--- a/07-ai-video/buoi-07-ai-video.pptx
+++ b/07-ai-video/buoi-07-ai-video.pptx
@@ -8242,8 +8242,8 @@
         </p:nvSpPr>
         <p:spPr>
           <a:xfrm>
-            <a:off x="2926080" y="5394960"/>
-            <a:ext cx="6309360" cy="347472"/>
+            <a:off x="2194560" y="5394960"/>
+            <a:ext cx="7772400" cy="347472"/>
           </a:xfrm>
           <a:prstGeom prst="roundRect">
             <a:avLst/>
@@ -8287,8 +8287,8 @@
         </p:nvSpPr>
         <p:spPr>
           <a:xfrm>
-            <a:off x="2962656" y="5394960"/>
-            <a:ext cx="6236208" cy="347472"/>
+            <a:off x="2231136" y="5394960"/>
+            <a:ext cx="7699248" cy="347472"/>
           </a:xfrm>
           <a:prstGeom prst="rect">
             <a:avLst/>
@@ -8309,7 +8309,7 @@
                 </a:solidFill>
                 <a:latin typeface="Aptos"/>
               </a:rPr>
-              <a:t>Lời thoại phải vừa duration của clip</a:t>
+              <a:t>Off-screen voice · voice bible · duration 4/6/8 · negative prompt</a:t>
             </a:r>
           </a:p>
         </p:txBody>
@@ -8405,7 +8405,7 @@
                 </a:solidFill>
                 <a:latin typeface="Aptos"/>
               </a:rPr>
-              <a:t>22 PHÚT · 2 ẢNH + 1 CLIP</a:t>
+              <a:t>22 PHÚT · BA CỔNG HITL</a:t>
             </a:r>
           </a:p>
         </p:txBody>
@@ -8623,7 +8623,7 @@
                 </a:solidFill>
                 <a:latin typeface="Aptos"/>
               </a:rPr>
-              <a:t>Chọn 2 scene</a:t>
+              <a:t>Duyệt script</a:t>
             </a:r>
           </a:p>
         </p:txBody>
@@ -8736,7 +8736,7 @@
                 </a:solidFill>
                 <a:latin typeface="Aptos"/>
               </a:rPr>
-              <a:t>Sinh 2 ảnh</a:t>
+              <a:t>Sinh + duyệt ảnh</a:t>
             </a:r>
           </a:p>
         </p:txBody>
@@ -8750,6 +8750,119 @@
         <p:spPr>
           <a:xfrm>
             <a:off x="5806440" y="1508760"/>
+            <a:ext cx="621792" cy="621792"/>
+          </a:xfrm>
+          <a:prstGeom prst="ellipse">
+            <a:avLst/>
+          </a:prstGeom>
+          <a:solidFill>
+            <a:srgbClr val="7C3AED"/>
+          </a:solidFill>
+          <a:ln>
+            <a:noFill/>
+          </a:ln>
+        </p:spPr>
+        <p:style>
+          <a:lnRef idx="1">
+            <a:schemeClr val="accent1"/>
+          </a:lnRef>
+          <a:fillRef idx="3">
+            <a:schemeClr val="accent1"/>
+          </a:fillRef>
+          <a:effectRef idx="2">
+            <a:schemeClr val="accent1"/>
+          </a:effectRef>
+          <a:fontRef idx="minor">
+            <a:schemeClr val="lt1"/>
+          </a:fontRef>
+        </p:style>
+        <p:txBody>
+          <a:bodyPr rtlCol="0" anchor="ctr"/>
+          <a:lstStyle/>
+          <a:p>
+            <a:pPr algn="ctr"/>
+          </a:p>
+        </p:txBody>
+      </p:sp>
+      <p:sp>
+        <p:nvSpPr>
+          <p:cNvPr id="14" name="TextBox 13"/>
+          <p:cNvSpPr txBox="1"/>
+          <p:nvPr/>
+        </p:nvSpPr>
+        <p:spPr>
+          <a:xfrm>
+            <a:off x="5806440" y="1508760"/>
+            <a:ext cx="621792" cy="621792"/>
+          </a:xfrm>
+          <a:prstGeom prst="rect">
+            <a:avLst/>
+          </a:prstGeom>
+          <a:noFill/>
+        </p:spPr>
+        <p:txBody>
+          <a:bodyPr wrap="square" anchor="ctr" lIns="45720" rIns="45720" tIns="27432" bIns="27432">
+            <a:spAutoFit/>
+          </a:bodyPr>
+          <a:lstStyle/>
+          <a:p>
+            <a:pPr algn="ctr"/>
+            <a:r>
+              <a:rPr sz="1600" b="1">
+                <a:solidFill>
+                  <a:srgbClr val="FFFFFF"/>
+                </a:solidFill>
+                <a:latin typeface="Aptos"/>
+              </a:rPr>
+              <a:t>3</a:t>
+            </a:r>
+          </a:p>
+        </p:txBody>
+      </p:sp>
+      <p:sp>
+        <p:nvSpPr>
+          <p:cNvPr id="15" name="TextBox 14"/>
+          <p:cNvSpPr txBox="1"/>
+          <p:nvPr/>
+        </p:nvSpPr>
+        <p:spPr>
+          <a:xfrm>
+            <a:off x="5166359" y="2331720"/>
+            <a:ext cx="1874519" cy="457200"/>
+          </a:xfrm>
+          <a:prstGeom prst="rect">
+            <a:avLst/>
+          </a:prstGeom>
+          <a:noFill/>
+        </p:spPr>
+        <p:txBody>
+          <a:bodyPr wrap="square" anchor="ctr" lIns="45720" rIns="45720" tIns="27432" bIns="27432">
+            <a:spAutoFit/>
+          </a:bodyPr>
+          <a:lstStyle/>
+          <a:p>
+            <a:pPr algn="ctr"/>
+            <a:r>
+              <a:rPr sz="1400" b="1">
+                <a:solidFill>
+                  <a:srgbClr val="0F172A"/>
+                </a:solidFill>
+                <a:latin typeface="Aptos"/>
+              </a:rPr>
+              <a:t>Tạo clip</a:t>
+            </a:r>
+          </a:p>
+        </p:txBody>
+      </p:sp>
+      <p:sp>
+        <p:nvSpPr>
+          <p:cNvPr id="16" name="Oval 15"/>
+          <p:cNvSpPr/>
+          <p:nvPr/>
+        </p:nvSpPr>
+        <p:spPr>
+          <a:xfrm>
+            <a:off x="8138159" y="1508760"/>
             <a:ext cx="621792" cy="621792"/>
           </a:xfrm>
           <a:prstGeom prst="ellipse">
@@ -8786,78 +8899,8 @@
       </p:sp>
       <p:sp>
         <p:nvSpPr>
-          <p:cNvPr id="14" name="TextBox 13"/>
-          <p:cNvSpPr txBox="1"/>
-          <p:nvPr/>
-        </p:nvSpPr>
-        <p:spPr>
-          <a:xfrm>
-            <a:off x="5806440" y="1508760"/>
-            <a:ext cx="621792" cy="621792"/>
-          </a:xfrm>
-          <a:prstGeom prst="rect">
-            <a:avLst/>
-          </a:prstGeom>
-          <a:noFill/>
-        </p:spPr>
-        <p:txBody>
-          <a:bodyPr wrap="square" anchor="ctr" lIns="45720" rIns="45720" tIns="27432" bIns="27432">
-            <a:spAutoFit/>
-          </a:bodyPr>
-          <a:lstStyle/>
-          <a:p>
-            <a:pPr algn="ctr"/>
-            <a:r>
-              <a:rPr sz="1600" b="1">
-                <a:solidFill>
-                  <a:srgbClr val="FFFFFF"/>
-                </a:solidFill>
-                <a:latin typeface="Aptos"/>
-              </a:rPr>
-              <a:t>3</a:t>
-            </a:r>
-          </a:p>
-        </p:txBody>
-      </p:sp>
-      <p:sp>
-        <p:nvSpPr>
-          <p:cNvPr id="15" name="TextBox 14"/>
-          <p:cNvSpPr txBox="1"/>
-          <p:nvPr/>
-        </p:nvSpPr>
-        <p:spPr>
-          <a:xfrm>
-            <a:off x="5166359" y="2331720"/>
-            <a:ext cx="1874519" cy="457200"/>
-          </a:xfrm>
-          <a:prstGeom prst="rect">
-            <a:avLst/>
-          </a:prstGeom>
-          <a:noFill/>
-        </p:spPr>
-        <p:txBody>
-          <a:bodyPr wrap="square" anchor="ctr" lIns="45720" rIns="45720" tIns="27432" bIns="27432">
-            <a:spAutoFit/>
-          </a:bodyPr>
-          <a:lstStyle/>
-          <a:p>
-            <a:pPr algn="ctr"/>
-            <a:r>
-              <a:rPr sz="1400" b="1">
-                <a:solidFill>
-                  <a:srgbClr val="0F172A"/>
-                </a:solidFill>
-                <a:latin typeface="Aptos"/>
-              </a:rPr>
-              <a:t>Người duyệt</a:t>
-            </a:r>
-          </a:p>
-        </p:txBody>
-      </p:sp>
-      <p:sp>
-        <p:nvSpPr>
-          <p:cNvPr id="16" name="Oval 15"/>
-          <p:cNvSpPr/>
+          <p:cNvPr id="17" name="TextBox 16"/>
+          <p:cNvSpPr txBox="1"/>
           <p:nvPr/>
         </p:nvSpPr>
         <p:spPr>
@@ -8865,49 +8908,6 @@
             <a:off x="8138159" y="1508760"/>
             <a:ext cx="621792" cy="621792"/>
           </a:xfrm>
-          <a:prstGeom prst="ellipse">
-            <a:avLst/>
-          </a:prstGeom>
-          <a:solidFill>
-            <a:srgbClr val="7C3AED"/>
-          </a:solidFill>
-          <a:ln>
-            <a:noFill/>
-          </a:ln>
-        </p:spPr>
-        <p:style>
-          <a:lnRef idx="1">
-            <a:schemeClr val="accent1"/>
-          </a:lnRef>
-          <a:fillRef idx="3">
-            <a:schemeClr val="accent1"/>
-          </a:fillRef>
-          <a:effectRef idx="2">
-            <a:schemeClr val="accent1"/>
-          </a:effectRef>
-          <a:fontRef idx="minor">
-            <a:schemeClr val="lt1"/>
-          </a:fontRef>
-        </p:style>
-        <p:txBody>
-          <a:bodyPr rtlCol="0" anchor="ctr"/>
-          <a:lstStyle/>
-          <a:p>
-            <a:pPr algn="ctr"/>
-          </a:p>
-        </p:txBody>
-      </p:sp>
-      <p:sp>
-        <p:nvSpPr>
-          <p:cNvPr id="17" name="TextBox 16"/>
-          <p:cNvSpPr txBox="1"/>
-          <p:nvPr/>
-        </p:nvSpPr>
-        <p:spPr>
-          <a:xfrm>
-            <a:off x="8138159" y="1508760"/>
-            <a:ext cx="621792" cy="621792"/>
-          </a:xfrm>
           <a:prstGeom prst="rect">
             <a:avLst/>
           </a:prstGeom>
@@ -8962,7 +8962,7 @@
                 </a:solidFill>
                 <a:latin typeface="Aptos"/>
               </a:rPr>
-              <a:t>Tạo 1 clip</a:t>
+              <a:t>Duyệt clip</a:t>
             </a:r>
           </a:p>
         </p:txBody>
@@ -9375,7 +9375,7 @@
                 </a:solidFill>
                 <a:latin typeface="Aptos"/>
               </a:rPr>
-              <a:t>Ảnh Approved → đúng clip → audio nghe được</a:t>
+              <a:t>Clip NEEDS_REVIEW → người xem/nghe → APPROVED</a:t>
             </a:r>
           </a:p>
         </p:txBody>
@@ -10091,7 +10091,7 @@
                 </a:solidFill>
                 <a:latin typeface="Aptos"/>
               </a:rPr>
-              <a:t>SUCCESS</a:t>
+              <a:t>APPROVED</a:t>
             </a:r>
           </a:p>
         </p:txBody>
@@ -10329,7 +10329,7 @@
                 </a:solidFill>
                 <a:latin typeface="Aptos"/>
               </a:rPr>
-              <a:t>GENERATING</a:t>
+              <a:t>NEEDS_REVIEW</a:t>
             </a:r>
           </a:p>
         </p:txBody>
@@ -10567,7 +10567,7 @@
                 </a:solidFill>
                 <a:latin typeface="Aptos"/>
               </a:rPr>
-              <a:t>ERROR</a:t>
+              <a:t>NEEDS_RETRY</a:t>
             </a:r>
           </a:p>
         </p:txBody>
@@ -10818,8 +10818,8 @@
         </p:nvSpPr>
         <p:spPr>
           <a:xfrm>
-            <a:off x="4343400" y="5715000"/>
-            <a:ext cx="5943600" cy="347472"/>
+            <a:off x="4023360" y="5715000"/>
+            <a:ext cx="6583680" cy="347472"/>
           </a:xfrm>
           <a:prstGeom prst="roundRect">
             <a:avLst/>
@@ -10863,8 +10863,8 @@
         </p:nvSpPr>
         <p:spPr>
           <a:xfrm>
-            <a:off x="4379976" y="5715000"/>
-            <a:ext cx="5870448" cy="347472"/>
+            <a:off x="4059936" y="5715000"/>
+            <a:ext cx="6510528" cy="347472"/>
           </a:xfrm>
           <a:prstGeom prst="rect">
             <a:avLst/>
@@ -10885,7 +10885,7 @@
                 </a:solidFill>
                 <a:latin typeface="Aptos"/>
               </a:rPr>
-              <a:t>Retry SC-03 · không reset clip đã SUCCESS</a:t>
+              <a:t>SUCCESS kỹ thuật ≠ APPROVED nghiệp vụ</a:t>
             </a:r>
           </a:p>
         </p:txBody>
@@ -11537,7 +11537,7 @@
             <a:avLst/>
           </a:prstGeom>
           <a:solidFill>
-            <a:srgbClr val="16A34A"/>
+            <a:srgbClr val="F59E0B"/>
           </a:solidFill>
           <a:ln>
             <a:noFill/>
@@ -11630,7 +11630,7 @@
                 </a:solidFill>
                 <a:latin typeface="Aptos"/>
               </a:rPr>
-              <a:t>Storyboard</a:t>
+              <a:t>Script Review</a:t>
             </a:r>
           </a:p>
         </p:txBody>
@@ -11665,7 +11665,7 @@
                 </a:solidFill>
                 <a:latin typeface="Aptos"/>
               </a:rPr>
-              <a:t>Approval</a:t>
+              <a:t>HITL</a:t>
             </a:r>
           </a:p>
         </p:txBody>
@@ -11730,7 +11730,7 @@
             <a:avLst/>
           </a:prstGeom>
           <a:solidFill>
-            <a:srgbClr val="7C3AED"/>
+            <a:srgbClr val="16A34A"/>
           </a:solidFill>
           <a:ln>
             <a:noFill/>
@@ -11788,7 +11788,7 @@
                 </a:solidFill>
                 <a:latin typeface="Aptos"/>
               </a:rPr>
-              <a:t>G</a:t>
+              <a:t>S</a:t>
             </a:r>
           </a:p>
         </p:txBody>
@@ -11823,7 +11823,7 @@
                 </a:solidFill>
                 <a:latin typeface="Aptos"/>
               </a:rPr>
-              <a:t>Generator</a:t>
+              <a:t>Storyboard</a:t>
             </a:r>
           </a:p>
         </p:txBody>
@@ -11858,7 +11858,7 @@
                 </a:solidFill>
                 <a:latin typeface="Aptos"/>
               </a:rPr>
-              <a:t>Sequential</a:t>
+              <a:t>HITL</a:t>
             </a:r>
           </a:p>
         </p:txBody>
@@ -11923,7 +11923,7 @@
             <a:avLst/>
           </a:prstGeom>
           <a:solidFill>
-            <a:srgbClr val="F59E0B"/>
+            <a:srgbClr val="7C3AED"/>
           </a:solidFill>
           <a:ln>
             <a:noFill/>
@@ -11981,7 +11981,7 @@
                 </a:solidFill>
                 <a:latin typeface="Aptos"/>
               </a:rPr>
-              <a:t>R</a:t>
+              <a:t>C</a:t>
             </a:r>
           </a:p>
         </p:txBody>
@@ -12016,7 +12016,7 @@
                 </a:solidFill>
                 <a:latin typeface="Aptos"/>
               </a:rPr>
-              <a:t>Review</a:t>
+              <a:t>Clip Review</a:t>
             </a:r>
           </a:p>
         </p:txBody>
@@ -12051,7 +12051,7 @@
                 </a:solidFill>
                 <a:latin typeface="Aptos"/>
               </a:rPr>
-              <a:t>Log/Export</a:t>
+              <a:t>Export</a:t>
             </a:r>
           </a:p>
         </p:txBody>
@@ -13000,7 +13000,7 @@
                 </a:solidFill>
                 <a:latin typeface="Aptos"/>
               </a:rPr>
-              <a:t>GIỮ TỪ RESOURCE</a:t>
+              <a:t>BA MÀN HÌNH DUYỆT</a:t>
             </a:r>
           </a:p>
         </p:txBody>
@@ -13035,9 +13035,9 @@
                 </a:solidFill>
                 <a:latin typeface="Aptos"/>
               </a:rPr>
-              <a:t>Canvas · pan/zoom · minimap
-Node · port · edge
-Status · progress · preview</a:t>
+              <a:t>Script Review
+Storyboard Review
+Clip Review</a:t>
             </a:r>
           </a:p>
         </p:txBody>
@@ -13117,7 +13117,7 @@
                 </a:solidFill>
                 <a:latin typeface="Aptos"/>
               </a:rPr>
-              <a:t>GIỮ</a:t>
+              <a:t>HITL</a:t>
             </a:r>
           </a:p>
         </p:txBody>
@@ -13182,11 +13182,11 @@
             <a:avLst/>
           </a:prstGeom>
           <a:solidFill>
-            <a:srgbClr val="DC2626"/>
+            <a:srgbClr val="16A34A"/>
           </a:solidFill>
           <a:ln>
             <a:solidFill>
-              <a:srgbClr val="DC2626"/>
+              <a:srgbClr val="16A34A"/>
             </a:solidFill>
           </a:ln>
         </p:spPr>
@@ -13242,7 +13242,7 @@
                 </a:solidFill>
                 <a:latin typeface="Aptos"/>
               </a:rPr>
-              <a:t>BỎ KHỎI RESOURCE</a:t>
+              <a:t>QUY TẮC GHÉP</a:t>
             </a:r>
           </a:p>
         </p:txBody>
@@ -13277,9 +13277,9 @@
                 </a:solidFill>
                 <a:latin typeface="Aptos"/>
               </a:rPr>
-              <a:t>Pipeline thay sản phẩm
-16:9 cố định · mute audio
-Asset giả · pseudo API</a:t>
+              <a:t>SUCCESS → NEEDS_REVIEW
+Người duyệt → APPROVED
+Chỉ Approved được assemble</a:t>
             </a:r>
           </a:p>
         </p:txBody>
@@ -13355,11 +13355,11 @@
             <a:r>
               <a:rPr sz="1000" b="1">
                 <a:solidFill>
-                  <a:srgbClr val="DC2626"/>
-                </a:solidFill>
-                <a:latin typeface="Aptos"/>
-              </a:rPr>
-              <a:t>BỎ</a:t>
+                  <a:srgbClr val="16A34A"/>
+                </a:solidFill>
+                <a:latin typeface="Aptos"/>
+              </a:rPr>
+              <a:t>GATE</a:t>
             </a:r>
           </a:p>
         </p:txBody>
@@ -13372,8 +13372,8 @@
         </p:nvSpPr>
         <p:spPr>
           <a:xfrm>
-            <a:off x="3017520" y="5440680"/>
-            <a:ext cx="6172200" cy="347472"/>
+            <a:off x="2743200" y="5440680"/>
+            <a:ext cx="6720840" cy="347472"/>
           </a:xfrm>
           <a:prstGeom prst="roundRect">
             <a:avLst/>
@@ -13417,8 +13417,8 @@
         </p:nvSpPr>
         <p:spPr>
           <a:xfrm>
-            <a:off x="3054096" y="5440680"/>
-            <a:ext cx="6099048" cy="347472"/>
+            <a:off x="2779776" y="5440680"/>
+            <a:ext cx="6647688" cy="347472"/>
           </a:xfrm>
           <a:prstGeom prst="rect">
             <a:avLst/>
@@ -13439,7 +13439,7 @@
                 </a:solidFill>
                 <a:latin typeface="Aptos"/>
               </a:rPr>
-              <a:t>App đọc engine-spec · không nghĩ lại nghiệp vụ</a:t>
+              <a:t>App hiển thị nghiệp vụ · không tự duyệt thay người</a:t>
             </a:r>
           </a:p>
         </p:txBody>
@@ -14084,7 +14084,7 @@
                 </a:solidFill>
                 <a:latin typeface="Aptos"/>
               </a:rPr>
-              <a:t>2 ảnh + 1 clip audio</a:t>
+              <a:t>Clip audio đã qua Review</a:t>
             </a:r>
           </a:p>
         </p:txBody>
@@ -14232,7 +14232,7 @@
                 </a:solidFill>
                 <a:latin typeface="Aptos"/>
               </a:rPr>
-              <a:t>Runtime/fallback rõ</a:t>
+              <a:t>Technical + review status</a:t>
             </a:r>
           </a:p>
         </p:txBody>
@@ -14380,7 +14380,7 @@
                 </a:solidFill>
                 <a:latin typeface="Aptos"/>
               </a:rPr>
-              <a:t>Độc lập công cụ</a:t>
+              <a:t>3 HITL gate, độc lập tool</a:t>
             </a:r>
           </a:p>
         </p:txBody>
@@ -20922,7 +20922,7 @@
                 </a:solidFill>
                 <a:latin typeface="Aptos"/>
               </a:rPr>
-              <a:t>NHÌN ĐÍCH ĐẾN TRƯỚC</a:t>
+              <a:t>BA CỔNG HITL TÁCH BIỆT</a:t>
             </a:r>
           </a:p>
         </p:txBody>
@@ -21040,8 +21040,8 @@
         </p:nvSpPr>
         <p:spPr>
           <a:xfrm>
-            <a:off x="502920" y="1508760"/>
-            <a:ext cx="1965960" cy="932688"/>
+            <a:off x="320040" y="1508760"/>
+            <a:ext cx="1645920" cy="932688"/>
           </a:xfrm>
           <a:prstGeom prst="roundRect">
             <a:avLst/>
@@ -21085,7 +21085,7 @@
         </p:nvSpPr>
         <p:spPr>
           <a:xfrm>
-            <a:off x="649224" y="1709928"/>
+            <a:off x="466344" y="1709928"/>
             <a:ext cx="502920" cy="502920"/>
           </a:xfrm>
           <a:prstGeom prst="ellipse">
@@ -21128,7 +21128,7 @@
         </p:nvSpPr>
         <p:spPr>
           <a:xfrm>
-            <a:off x="649224" y="1709928"/>
+            <a:off x="466344" y="1709928"/>
             <a:ext cx="502920" cy="502920"/>
           </a:xfrm>
           <a:prstGeom prst="rect">
@@ -21163,8 +21163,8 @@
         </p:nvSpPr>
         <p:spPr>
           <a:xfrm>
-            <a:off x="1289304" y="1627631"/>
-            <a:ext cx="1069848" cy="310896"/>
+            <a:off x="1106424" y="1627631"/>
+            <a:ext cx="749808" cy="310896"/>
           </a:xfrm>
           <a:prstGeom prst="rect">
             <a:avLst/>
@@ -21198,8 +21198,8 @@
         </p:nvSpPr>
         <p:spPr>
           <a:xfrm>
-            <a:off x="1289304" y="1965960"/>
-            <a:ext cx="1069848" cy="274320"/>
+            <a:off x="1106424" y="1965960"/>
+            <a:ext cx="749808" cy="274320"/>
           </a:xfrm>
           <a:prstGeom prst="rect">
             <a:avLst/>
@@ -21220,7 +21220,7 @@
                 </a:solidFill>
                 <a:latin typeface="Aptos"/>
               </a:rPr>
-              <a:t>SC-01 + SC-04</a:t>
+              <a:t>Approved</a:t>
             </a:r>
           </a:p>
         </p:txBody>
@@ -21233,23 +21233,23 @@
         </p:nvSpPr>
         <p:spPr>
           <a:xfrm>
-            <a:off x="2487168" y="1691640"/>
-            <a:ext cx="365760" cy="502920"/>
-          </a:xfrm>
-          <a:prstGeom prst="rect">
-            <a:avLst/>
-          </a:prstGeom>
-          <a:noFill/>
-        </p:spPr>
-        <p:txBody>
-          <a:bodyPr wrap="square" anchor="ctr" lIns="45720" rIns="45720" tIns="27432" bIns="27432">
-            <a:spAutoFit/>
-          </a:bodyPr>
-          <a:lstStyle/>
-          <a:p>
-            <a:pPr algn="ctr"/>
-            <a:r>
-              <a:rPr sz="2300" b="1">
+            <a:off x="1993392" y="1691640"/>
+            <a:ext cx="274320" cy="502920"/>
+          </a:xfrm>
+          <a:prstGeom prst="rect">
+            <a:avLst/>
+          </a:prstGeom>
+          <a:noFill/>
+        </p:spPr>
+        <p:txBody>
+          <a:bodyPr wrap="square" anchor="ctr" lIns="45720" rIns="45720" tIns="27432" bIns="27432">
+            <a:spAutoFit/>
+          </a:bodyPr>
+          <a:lstStyle/>
+          <a:p>
+            <a:pPr algn="ctr"/>
+            <a:r>
+              <a:rPr sz="2000" b="1">
                 <a:solidFill>
                   <a:srgbClr val="94A3B8"/>
                 </a:solidFill>
@@ -21268,8 +21268,8 @@
         </p:nvSpPr>
         <p:spPr>
           <a:xfrm>
-            <a:off x="2880360" y="1508760"/>
-            <a:ext cx="1965960" cy="932688"/>
+            <a:off x="2286000" y="1508760"/>
+            <a:ext cx="1645920" cy="932688"/>
           </a:xfrm>
           <a:prstGeom prst="roundRect">
             <a:avLst/>
@@ -21313,7 +21313,7 @@
         </p:nvSpPr>
         <p:spPr>
           <a:xfrm>
-            <a:off x="3026664" y="1709928"/>
+            <a:off x="2432304" y="1709928"/>
             <a:ext cx="502920" cy="502920"/>
           </a:xfrm>
           <a:prstGeom prst="ellipse">
@@ -21356,7 +21356,7 @@
         </p:nvSpPr>
         <p:spPr>
           <a:xfrm>
-            <a:off x="3026664" y="1709928"/>
+            <a:off x="2432304" y="1709928"/>
             <a:ext cx="502920" cy="502920"/>
           </a:xfrm>
           <a:prstGeom prst="rect">
@@ -21378,7 +21378,7 @@
                 </a:solidFill>
                 <a:latin typeface="Aptos"/>
               </a:rPr>
-              <a:t>S</a:t>
+              <a:t>F</a:t>
             </a:r>
           </a:p>
         </p:txBody>
@@ -21391,8 +21391,8 @@
         </p:nvSpPr>
         <p:spPr>
           <a:xfrm>
-            <a:off x="3666744" y="1627631"/>
-            <a:ext cx="1069848" cy="310896"/>
+            <a:off x="3072384" y="1627631"/>
+            <a:ext cx="749808" cy="310896"/>
           </a:xfrm>
           <a:prstGeom prst="rect">
             <a:avLst/>
@@ -21413,7 +21413,7 @@
                 </a:solidFill>
                 <a:latin typeface="Aptos"/>
               </a:rPr>
-              <a:t>Storyboard</a:t>
+              <a:t>Frame</a:t>
             </a:r>
           </a:p>
         </p:txBody>
@@ -21426,8 +21426,8 @@
         </p:nvSpPr>
         <p:spPr>
           <a:xfrm>
-            <a:off x="3666744" y="1965960"/>
-            <a:ext cx="1069848" cy="274320"/>
+            <a:off x="3072384" y="1965960"/>
+            <a:ext cx="749808" cy="274320"/>
           </a:xfrm>
           <a:prstGeom prst="rect">
             <a:avLst/>
@@ -21448,7 +21448,7 @@
                 </a:solidFill>
                 <a:latin typeface="Aptos"/>
               </a:rPr>
-              <a:t>FR-01 + FR-04</a:t>
+              <a:t>Approved</a:t>
             </a:r>
           </a:p>
         </p:txBody>
@@ -21461,23 +21461,23 @@
         </p:nvSpPr>
         <p:spPr>
           <a:xfrm>
-            <a:off x="4864608" y="1691640"/>
-            <a:ext cx="365760" cy="502920"/>
-          </a:xfrm>
-          <a:prstGeom prst="rect">
-            <a:avLst/>
-          </a:prstGeom>
-          <a:noFill/>
-        </p:spPr>
-        <p:txBody>
-          <a:bodyPr wrap="square" anchor="ctr" lIns="45720" rIns="45720" tIns="27432" bIns="27432">
-            <a:spAutoFit/>
-          </a:bodyPr>
-          <a:lstStyle/>
-          <a:p>
-            <a:pPr algn="ctr"/>
-            <a:r>
-              <a:rPr sz="2300" b="1">
+            <a:off x="3959352" y="1691640"/>
+            <a:ext cx="274320" cy="502920"/>
+          </a:xfrm>
+          <a:prstGeom prst="rect">
+            <a:avLst/>
+          </a:prstGeom>
+          <a:noFill/>
+        </p:spPr>
+        <p:txBody>
+          <a:bodyPr wrap="square" anchor="ctr" lIns="45720" rIns="45720" tIns="27432" bIns="27432">
+            <a:spAutoFit/>
+          </a:bodyPr>
+          <a:lstStyle/>
+          <a:p>
+            <a:pPr algn="ctr"/>
+            <a:r>
+              <a:rPr sz="2000" b="1">
                 <a:solidFill>
                   <a:srgbClr val="94A3B8"/>
                 </a:solidFill>
@@ -21496,8 +21496,8 @@
         </p:nvSpPr>
         <p:spPr>
           <a:xfrm>
-            <a:off x="5257800" y="1508760"/>
-            <a:ext cx="1965960" cy="932688"/>
+            <a:off x="4251960" y="1508760"/>
+            <a:ext cx="1645920" cy="932688"/>
           </a:xfrm>
           <a:prstGeom prst="roundRect">
             <a:avLst/>
@@ -21541,14 +21541,14 @@
         </p:nvSpPr>
         <p:spPr>
           <a:xfrm>
-            <a:off x="5404104" y="1709928"/>
+            <a:off x="4398264" y="1709928"/>
             <a:ext cx="502920" cy="502920"/>
           </a:xfrm>
           <a:prstGeom prst="ellipse">
             <a:avLst/>
           </a:prstGeom>
           <a:solidFill>
-            <a:srgbClr val="F59E0B"/>
+            <a:srgbClr val="7C3AED"/>
           </a:solidFill>
           <a:ln>
             <a:noFill/>
@@ -21584,7 +21584,7 @@
         </p:nvSpPr>
         <p:spPr>
           <a:xfrm>
-            <a:off x="5404104" y="1709928"/>
+            <a:off x="4398264" y="1709928"/>
             <a:ext cx="502920" cy="502920"/>
           </a:xfrm>
           <a:prstGeom prst="rect">
@@ -21606,7 +21606,7 @@
                 </a:solidFill>
                 <a:latin typeface="Aptos"/>
               </a:rPr>
-              <a:t>R</a:t>
+              <a:t>G</a:t>
             </a:r>
           </a:p>
         </p:txBody>
@@ -21619,8 +21619,8 @@
         </p:nvSpPr>
         <p:spPr>
           <a:xfrm>
-            <a:off x="6044184" y="1627631"/>
-            <a:ext cx="1069848" cy="310896"/>
+            <a:off x="5038344" y="1627631"/>
+            <a:ext cx="749808" cy="310896"/>
           </a:xfrm>
           <a:prstGeom prst="rect">
             <a:avLst/>
@@ -21641,7 +21641,7 @@
                 </a:solidFill>
                 <a:latin typeface="Aptos"/>
               </a:rPr>
-              <a:t>Review</a:t>
+              <a:t>Generator</a:t>
             </a:r>
           </a:p>
         </p:txBody>
@@ -21654,8 +21654,8 @@
         </p:nvSpPr>
         <p:spPr>
           <a:xfrm>
-            <a:off x="6044184" y="1965960"/>
-            <a:ext cx="1069848" cy="274320"/>
+            <a:off x="5038344" y="1965960"/>
+            <a:ext cx="749808" cy="274320"/>
           </a:xfrm>
           <a:prstGeom prst="rect">
             <a:avLst/>
@@ -21676,7 +21676,7 @@
                 </a:solidFill>
                 <a:latin typeface="Aptos"/>
               </a:rPr>
-              <a:t>1 Approved</a:t>
+              <a:t>Sequential</a:t>
             </a:r>
           </a:p>
         </p:txBody>
@@ -21689,23 +21689,23 @@
         </p:nvSpPr>
         <p:spPr>
           <a:xfrm>
-            <a:off x="7242048" y="1691640"/>
-            <a:ext cx="365760" cy="502920"/>
-          </a:xfrm>
-          <a:prstGeom prst="rect">
-            <a:avLst/>
-          </a:prstGeom>
-          <a:noFill/>
-        </p:spPr>
-        <p:txBody>
-          <a:bodyPr wrap="square" anchor="ctr" lIns="45720" rIns="45720" tIns="27432" bIns="27432">
-            <a:spAutoFit/>
-          </a:bodyPr>
-          <a:lstStyle/>
-          <a:p>
-            <a:pPr algn="ctr"/>
-            <a:r>
-              <a:rPr sz="2300" b="1">
+            <a:off x="5925312" y="1691640"/>
+            <a:ext cx="274320" cy="502920"/>
+          </a:xfrm>
+          <a:prstGeom prst="rect">
+            <a:avLst/>
+          </a:prstGeom>
+          <a:noFill/>
+        </p:spPr>
+        <p:txBody>
+          <a:bodyPr wrap="square" anchor="ctr" lIns="45720" rIns="45720" tIns="27432" bIns="27432">
+            <a:spAutoFit/>
+          </a:bodyPr>
+          <a:lstStyle/>
+          <a:p>
+            <a:pPr algn="ctr"/>
+            <a:r>
+              <a:rPr sz="2000" b="1">
                 <a:solidFill>
                   <a:srgbClr val="94A3B8"/>
                 </a:solidFill>
@@ -21724,8 +21724,8 @@
         </p:nvSpPr>
         <p:spPr>
           <a:xfrm>
-            <a:off x="7635240" y="1508760"/>
-            <a:ext cx="1965960" cy="932688"/>
+            <a:off x="6217920" y="1508760"/>
+            <a:ext cx="1645920" cy="932688"/>
           </a:xfrm>
           <a:prstGeom prst="roundRect">
             <a:avLst/>
@@ -21769,14 +21769,14 @@
         </p:nvSpPr>
         <p:spPr>
           <a:xfrm>
-            <a:off x="7781544" y="1709928"/>
+            <a:off x="6364224" y="1709928"/>
             <a:ext cx="502920" cy="502920"/>
           </a:xfrm>
           <a:prstGeom prst="ellipse">
             <a:avLst/>
           </a:prstGeom>
           <a:solidFill>
-            <a:srgbClr val="7C3AED"/>
+            <a:srgbClr val="F59E0B"/>
           </a:solidFill>
           <a:ln>
             <a:noFill/>
@@ -21812,7 +21812,7 @@
         </p:nvSpPr>
         <p:spPr>
           <a:xfrm>
-            <a:off x="7781544" y="1709928"/>
+            <a:off x="6364224" y="1709928"/>
             <a:ext cx="502920" cy="502920"/>
           </a:xfrm>
           <a:prstGeom prst="rect">
@@ -21834,7 +21834,7 @@
                 </a:solidFill>
                 <a:latin typeface="Aptos"/>
               </a:rPr>
-              <a:t>G</a:t>
+              <a:t>C</a:t>
             </a:r>
           </a:p>
         </p:txBody>
@@ -21847,8 +21847,8 @@
         </p:nvSpPr>
         <p:spPr>
           <a:xfrm>
-            <a:off x="8421624" y="1627631"/>
-            <a:ext cx="1069848" cy="310896"/>
+            <a:off x="7004304" y="1627631"/>
+            <a:ext cx="749808" cy="310896"/>
           </a:xfrm>
           <a:prstGeom prst="rect">
             <a:avLst/>
@@ -21869,7 +21869,7 @@
                 </a:solidFill>
                 <a:latin typeface="Aptos"/>
               </a:rPr>
-              <a:t>Generator</a:t>
+              <a:t>Clip</a:t>
             </a:r>
           </a:p>
         </p:txBody>
@@ -21882,8 +21882,8 @@
         </p:nvSpPr>
         <p:spPr>
           <a:xfrm>
-            <a:off x="8421624" y="1965960"/>
-            <a:ext cx="1069848" cy="274320"/>
+            <a:off x="7004304" y="1965960"/>
+            <a:ext cx="749808" cy="274320"/>
           </a:xfrm>
           <a:prstGeom prst="rect">
             <a:avLst/>
@@ -21904,7 +21904,7 @@
                 </a:solidFill>
                 <a:latin typeface="Aptos"/>
               </a:rPr>
-              <a:t>Sequential</a:t>
+              <a:t>Needs Review</a:t>
             </a:r>
           </a:p>
         </p:txBody>
@@ -21917,23 +21917,23 @@
         </p:nvSpPr>
         <p:spPr>
           <a:xfrm>
-            <a:off x="9619488" y="1691640"/>
-            <a:ext cx="365760" cy="502920"/>
-          </a:xfrm>
-          <a:prstGeom prst="rect">
-            <a:avLst/>
-          </a:prstGeom>
-          <a:noFill/>
-        </p:spPr>
-        <p:txBody>
-          <a:bodyPr wrap="square" anchor="ctr" lIns="45720" rIns="45720" tIns="27432" bIns="27432">
-            <a:spAutoFit/>
-          </a:bodyPr>
-          <a:lstStyle/>
-          <a:p>
-            <a:pPr algn="ctr"/>
-            <a:r>
-              <a:rPr sz="2300" b="1">
+            <a:off x="7891272" y="1691640"/>
+            <a:ext cx="274320" cy="502920"/>
+          </a:xfrm>
+          <a:prstGeom prst="rect">
+            <a:avLst/>
+          </a:prstGeom>
+          <a:noFill/>
+        </p:spPr>
+        <p:txBody>
+          <a:bodyPr wrap="square" anchor="ctr" lIns="45720" rIns="45720" tIns="27432" bIns="27432">
+            <a:spAutoFit/>
+          </a:bodyPr>
+          <a:lstStyle/>
+          <a:p>
+            <a:pPr algn="ctr"/>
+            <a:r>
+              <a:rPr sz="2000" b="1">
                 <a:solidFill>
                   <a:srgbClr val="94A3B8"/>
                 </a:solidFill>
@@ -21952,7 +21952,7 @@
         </p:nvSpPr>
         <p:spPr>
           <a:xfrm>
-            <a:off x="10012680" y="1508760"/>
+            <a:off x="8183879" y="1508760"/>
             <a:ext cx="1645920" cy="932688"/>
           </a:xfrm>
           <a:prstGeom prst="roundRect">
@@ -21997,14 +21997,14 @@
         </p:nvSpPr>
         <p:spPr>
           <a:xfrm>
-            <a:off x="10158984" y="1709928"/>
+            <a:off x="8330183" y="1709928"/>
             <a:ext cx="502920" cy="502920"/>
           </a:xfrm>
           <a:prstGeom prst="ellipse">
             <a:avLst/>
           </a:prstGeom>
           <a:solidFill>
-            <a:srgbClr val="0F172A"/>
+            <a:srgbClr val="16A34A"/>
           </a:solidFill>
           <a:ln>
             <a:noFill/>
@@ -22040,7 +22040,7 @@
         </p:nvSpPr>
         <p:spPr>
           <a:xfrm>
-            <a:off x="10158984" y="1709928"/>
+            <a:off x="8330183" y="1709928"/>
             <a:ext cx="502920" cy="502920"/>
           </a:xfrm>
           <a:prstGeom prst="rect">
@@ -22062,7 +22062,7 @@
                 </a:solidFill>
                 <a:latin typeface="Aptos"/>
               </a:rPr>
-              <a:t>C</a:t>
+              <a:t>R</a:t>
             </a:r>
           </a:p>
         </p:txBody>
@@ -22075,7 +22075,7 @@
         </p:nvSpPr>
         <p:spPr>
           <a:xfrm>
-            <a:off x="10799063" y="1627631"/>
+            <a:off x="8970263" y="1627631"/>
             <a:ext cx="749808" cy="310896"/>
           </a:xfrm>
           <a:prstGeom prst="rect">
@@ -22097,7 +22097,7 @@
                 </a:solidFill>
                 <a:latin typeface="Aptos"/>
               </a:rPr>
-              <a:t>Clip</a:t>
+              <a:t>Review</a:t>
             </a:r>
           </a:p>
         </p:txBody>
@@ -22110,7 +22110,7 @@
         </p:nvSpPr>
         <p:spPr>
           <a:xfrm>
-            <a:off x="10799063" y="1965960"/>
+            <a:off x="8970263" y="1965960"/>
             <a:ext cx="749808" cy="274320"/>
           </a:xfrm>
           <a:prstGeom prst="rect">
@@ -22132,21 +22132,56 @@
                 </a:solidFill>
                 <a:latin typeface="Aptos"/>
               </a:rPr>
-              <a:t>Audio + log</a:t>
-            </a:r>
-          </a:p>
-        </p:txBody>
-      </p:sp>
-      <p:sp>
-        <p:nvSpPr>
-          <p:cNvPr id="36" name="Rounded Rectangle 35"/>
+              <a:t>Approved</a:t>
+            </a:r>
+          </a:p>
+        </p:txBody>
+      </p:sp>
+      <p:sp>
+        <p:nvSpPr>
+          <p:cNvPr id="36" name="TextBox 35"/>
+          <p:cNvSpPr txBox="1"/>
+          <p:nvPr/>
+        </p:nvSpPr>
+        <p:spPr>
+          <a:xfrm>
+            <a:off x="9857232" y="1691640"/>
+            <a:ext cx="274320" cy="502920"/>
+          </a:xfrm>
+          <a:prstGeom prst="rect">
+            <a:avLst/>
+          </a:prstGeom>
+          <a:noFill/>
+        </p:spPr>
+        <p:txBody>
+          <a:bodyPr wrap="square" anchor="ctr" lIns="45720" rIns="45720" tIns="27432" bIns="27432">
+            <a:spAutoFit/>
+          </a:bodyPr>
+          <a:lstStyle/>
+          <a:p>
+            <a:pPr algn="ctr"/>
+            <a:r>
+              <a:rPr sz="2000" b="1">
+                <a:solidFill>
+                  <a:srgbClr val="94A3B8"/>
+                </a:solidFill>
+                <a:latin typeface="Aptos"/>
+              </a:rPr>
+              <a:t>→</a:t>
+            </a:r>
+          </a:p>
+        </p:txBody>
+      </p:sp>
+      <p:sp>
+        <p:nvSpPr>
+          <p:cNvPr id="37" name="Rounded Rectangle 36"/>
           <p:cNvSpPr/>
           <p:nvPr/>
         </p:nvSpPr>
         <p:spPr>
           <a:xfrm>
-            <a:off x="685800" y="3154680"/>
-            <a:ext cx="5074920" cy="1600200"/>
+            <a:off x="10149840" y="1508760"/>
+            <a:ext cx="1645920" cy="932688"/>
           </a:xfrm>
           <a:prstGeom prst="roundRect">
             <a:avLst/>
@@ -22184,7 +22219,200 @@
       </p:sp>
       <p:sp>
         <p:nvSpPr>
-          <p:cNvPr id="37" name="Rectangle 36"/>
+          <p:cNvPr id="38" name="Oval 37"/>
+          <p:cNvSpPr/>
+          <p:nvPr/>
+        </p:nvSpPr>
+        <p:spPr>
+          <a:xfrm>
+            <a:off x="10296144" y="1709928"/>
+            <a:ext cx="502920" cy="502920"/>
+          </a:xfrm>
+          <a:prstGeom prst="ellipse">
+            <a:avLst/>
+          </a:prstGeom>
+          <a:solidFill>
+            <a:srgbClr val="0F172A"/>
+          </a:solidFill>
+          <a:ln>
+            <a:noFill/>
+          </a:ln>
+        </p:spPr>
+        <p:style>
+          <a:lnRef idx="1">
+            <a:schemeClr val="accent1"/>
+          </a:lnRef>
+          <a:fillRef idx="3">
+            <a:schemeClr val="accent1"/>
+          </a:fillRef>
+          <a:effectRef idx="2">
+            <a:schemeClr val="accent1"/>
+          </a:effectRef>
+          <a:fontRef idx="minor">
+            <a:schemeClr val="lt1"/>
+          </a:fontRef>
+        </p:style>
+        <p:txBody>
+          <a:bodyPr rtlCol="0" anchor="ctr"/>
+          <a:lstStyle/>
+          <a:p>
+            <a:pPr algn="ctr"/>
+          </a:p>
+        </p:txBody>
+      </p:sp>
+      <p:sp>
+        <p:nvSpPr>
+          <p:cNvPr id="39" name="TextBox 38"/>
+          <p:cNvSpPr txBox="1"/>
+          <p:nvPr/>
+        </p:nvSpPr>
+        <p:spPr>
+          <a:xfrm>
+            <a:off x="10296144" y="1709928"/>
+            <a:ext cx="502920" cy="502920"/>
+          </a:xfrm>
+          <a:prstGeom prst="rect">
+            <a:avLst/>
+          </a:prstGeom>
+          <a:noFill/>
+        </p:spPr>
+        <p:txBody>
+          <a:bodyPr wrap="square" anchor="ctr" lIns="45720" rIns="45720" tIns="27432" bIns="27432">
+            <a:spAutoFit/>
+          </a:bodyPr>
+          <a:lstStyle/>
+          <a:p>
+            <a:pPr algn="ctr"/>
+            <a:r>
+              <a:rPr sz="1600" b="1">
+                <a:solidFill>
+                  <a:srgbClr val="FFFFFF"/>
+                </a:solidFill>
+                <a:latin typeface="Aptos"/>
+              </a:rPr>
+              <a:t>L</a:t>
+            </a:r>
+          </a:p>
+        </p:txBody>
+      </p:sp>
+      <p:sp>
+        <p:nvSpPr>
+          <p:cNvPr id="40" name="TextBox 39"/>
+          <p:cNvSpPr txBox="1"/>
+          <p:nvPr/>
+        </p:nvSpPr>
+        <p:spPr>
+          <a:xfrm>
+            <a:off x="10936224" y="1627631"/>
+            <a:ext cx="749808" cy="310896"/>
+          </a:xfrm>
+          <a:prstGeom prst="rect">
+            <a:avLst/>
+          </a:prstGeom>
+          <a:noFill/>
+        </p:spPr>
+        <p:txBody>
+          <a:bodyPr wrap="square" anchor="ctr" lIns="45720" rIns="45720" tIns="27432" bIns="27432">
+            <a:spAutoFit/>
+          </a:bodyPr>
+          <a:lstStyle/>
+          <a:p>
+            <a:pPr algn="l"/>
+            <a:r>
+              <a:rPr sz="1300" b="1">
+                <a:solidFill>
+                  <a:srgbClr val="0F172A"/>
+                </a:solidFill>
+                <a:latin typeface="Aptos"/>
+              </a:rPr>
+              <a:t>Log</a:t>
+            </a:r>
+          </a:p>
+        </p:txBody>
+      </p:sp>
+      <p:sp>
+        <p:nvSpPr>
+          <p:cNvPr id="41" name="TextBox 40"/>
+          <p:cNvSpPr txBox="1"/>
+          <p:nvPr/>
+        </p:nvSpPr>
+        <p:spPr>
+          <a:xfrm>
+            <a:off x="10936224" y="1965960"/>
+            <a:ext cx="749808" cy="274320"/>
+          </a:xfrm>
+          <a:prstGeom prst="rect">
+            <a:avLst/>
+          </a:prstGeom>
+          <a:noFill/>
+        </p:spPr>
+        <p:txBody>
+          <a:bodyPr wrap="square" anchor="ctr" lIns="45720" rIns="45720" tIns="27432" bIns="27432">
+            <a:spAutoFit/>
+          </a:bodyPr>
+          <a:lstStyle/>
+          <a:p>
+            <a:pPr algn="l"/>
+            <a:r>
+              <a:rPr sz="900" b="0">
+                <a:solidFill>
+                  <a:srgbClr val="475569"/>
+                </a:solidFill>
+                <a:latin typeface="Aptos"/>
+              </a:rPr>
+              <a:t>Decision</a:t>
+            </a:r>
+          </a:p>
+        </p:txBody>
+      </p:sp>
+      <p:sp>
+        <p:nvSpPr>
+          <p:cNvPr id="42" name="Rounded Rectangle 41"/>
+          <p:cNvSpPr/>
+          <p:nvPr/>
+        </p:nvSpPr>
+        <p:spPr>
+          <a:xfrm>
+            <a:off x="685800" y="3154680"/>
+            <a:ext cx="5074920" cy="1600200"/>
+          </a:xfrm>
+          <a:prstGeom prst="roundRect">
+            <a:avLst/>
+          </a:prstGeom>
+          <a:solidFill>
+            <a:srgbClr val="FFFFFF"/>
+          </a:solidFill>
+          <a:ln>
+            <a:solidFill>
+              <a:srgbClr val="E2E8F0"/>
+            </a:solidFill>
+          </a:ln>
+        </p:spPr>
+        <p:style>
+          <a:lnRef idx="1">
+            <a:schemeClr val="accent1"/>
+          </a:lnRef>
+          <a:fillRef idx="3">
+            <a:schemeClr val="accent1"/>
+          </a:fillRef>
+          <a:effectRef idx="2">
+            <a:schemeClr val="accent1"/>
+          </a:effectRef>
+          <a:fontRef idx="minor">
+            <a:schemeClr val="lt1"/>
+          </a:fontRef>
+        </p:style>
+        <p:txBody>
+          <a:bodyPr rtlCol="0" anchor="ctr"/>
+          <a:lstStyle/>
+          <a:p>
+            <a:pPr algn="ctr"/>
+          </a:p>
+        </p:txBody>
+      </p:sp>
+      <p:sp>
+        <p:nvSpPr>
+          <p:cNvPr id="43" name="Rectangle 42"/>
           <p:cNvSpPr/>
           <p:nvPr/>
         </p:nvSpPr>
@@ -22229,7 +22457,7 @@
       </p:sp>
       <p:sp>
         <p:nvSpPr>
-          <p:cNvPr id="38" name="TextBox 37"/>
+          <p:cNvPr id="44" name="TextBox 43"/>
           <p:cNvSpPr txBox="1"/>
           <p:nvPr/>
         </p:nvSpPr>
@@ -22264,7 +22492,7 @@
       </p:sp>
       <p:sp>
         <p:nvSpPr>
-          <p:cNvPr id="39" name="TextBox 38"/>
+          <p:cNvPr id="45" name="TextBox 44"/>
           <p:cNvSpPr txBox="1"/>
           <p:nvPr/>
         </p:nvSpPr>
@@ -22299,7 +22527,7 @@
       </p:sp>
       <p:sp>
         <p:nvSpPr>
-          <p:cNvPr id="40" name="Rounded Rectangle 39"/>
+          <p:cNvPr id="46" name="Rounded Rectangle 45"/>
           <p:cNvSpPr/>
           <p:nvPr/>
         </p:nvSpPr>
@@ -22344,7 +22572,7 @@
       </p:sp>
       <p:sp>
         <p:nvSpPr>
-          <p:cNvPr id="41" name="Rectangle 40"/>
+          <p:cNvPr id="47" name="Rectangle 46"/>
           <p:cNvSpPr/>
           <p:nvPr/>
         </p:nvSpPr>
@@ -22389,7 +22617,7 @@
       </p:sp>
       <p:sp>
         <p:nvSpPr>
-          <p:cNvPr id="42" name="TextBox 41"/>
+          <p:cNvPr id="48" name="TextBox 47"/>
           <p:cNvSpPr txBox="1"/>
           <p:nvPr/>
         </p:nvSpPr>
@@ -22424,7 +22652,7 @@
       </p:sp>
       <p:sp>
         <p:nvSpPr>
-          <p:cNvPr id="43" name="TextBox 42"/>
+          <p:cNvPr id="49" name="TextBox 48"/>
           <p:cNvSpPr txBox="1"/>
           <p:nvPr/>
         </p:nvSpPr>
